--- a/livro_ia_educacao/saida/pptx/Cap05_slides.pptx
+++ b/livro_ia_educacao/saida/pptx/Cap05_slides.pptx
@@ -7687,11 +7687,11 @@
         <p:spPr>
           <a:xfrm>
             <a:off x="548640" y="1417320"/>
-            <a:ext cx="11064240" cy="762000"/>
+            <a:ext cx="11064240" cy="682752"/>
           </a:xfrm>
           <a:prstGeom prst="roundRect">
             <a:avLst>
-              <a:gd name="adj" fmla="val 14400"/>
+              <a:gd name="adj" fmla="val 16071"/>
             </a:avLst>
           </a:prstGeom>
           <a:solidFill>
@@ -7718,7 +7718,7 @@
         <p:spPr>
           <a:xfrm>
             <a:off x="731520" y="1417320"/>
-            <a:ext cx="548640" cy="762000"/>
+            <a:ext cx="548640" cy="682752"/>
           </a:xfrm>
           <a:prstGeom prst="rect">
             <a:avLst/>
@@ -7754,7 +7754,7 @@
         <p:spPr>
           <a:xfrm>
             <a:off x="1463040" y="1417320"/>
-            <a:ext cx="9966960" cy="762000"/>
+            <a:ext cx="9966960" cy="682752"/>
           </a:xfrm>
           <a:prstGeom prst="rect">
             <a:avLst/>
@@ -7789,12 +7789,12 @@
         </p:nvSpPr>
         <p:spPr>
           <a:xfrm>
-            <a:off x="548640" y="2289048"/>
-            <a:ext cx="11064240" cy="762000"/>
+            <a:off x="548640" y="2209800"/>
+            <a:ext cx="11064240" cy="682752"/>
           </a:xfrm>
           <a:prstGeom prst="roundRect">
             <a:avLst>
-              <a:gd name="adj" fmla="val 14400"/>
+              <a:gd name="adj" fmla="val 16071"/>
             </a:avLst>
           </a:prstGeom>
           <a:solidFill>
@@ -7820,8 +7820,8 @@
         </p:nvSpPr>
         <p:spPr>
           <a:xfrm>
-            <a:off x="731520" y="2289048"/>
-            <a:ext cx="548640" cy="762000"/>
+            <a:off x="731520" y="2209800"/>
+            <a:ext cx="548640" cy="682752"/>
           </a:xfrm>
           <a:prstGeom prst="rect">
             <a:avLst/>
@@ -7856,8 +7856,8 @@
         </p:nvSpPr>
         <p:spPr>
           <a:xfrm>
-            <a:off x="1463040" y="2289048"/>
-            <a:ext cx="9966960" cy="762000"/>
+            <a:off x="1463040" y="2209800"/>
+            <a:ext cx="9966960" cy="682752"/>
           </a:xfrm>
           <a:prstGeom prst="rect">
             <a:avLst/>
@@ -7892,12 +7892,12 @@
         </p:nvSpPr>
         <p:spPr>
           <a:xfrm>
-            <a:off x="548640" y="3160776"/>
-            <a:ext cx="11064240" cy="762000"/>
+            <a:off x="548640" y="3002280"/>
+            <a:ext cx="11064240" cy="682752"/>
           </a:xfrm>
           <a:prstGeom prst="roundRect">
             <a:avLst>
-              <a:gd name="adj" fmla="val 14400"/>
+              <a:gd name="adj" fmla="val 16071"/>
             </a:avLst>
           </a:prstGeom>
           <a:solidFill>
@@ -7923,8 +7923,8 @@
         </p:nvSpPr>
         <p:spPr>
           <a:xfrm>
-            <a:off x="731520" y="3160776"/>
-            <a:ext cx="548640" cy="762000"/>
+            <a:off x="731520" y="3002280"/>
+            <a:ext cx="548640" cy="682752"/>
           </a:xfrm>
           <a:prstGeom prst="rect">
             <a:avLst/>
@@ -7959,8 +7959,8 @@
         </p:nvSpPr>
         <p:spPr>
           <a:xfrm>
-            <a:off x="1463040" y="3160776"/>
-            <a:ext cx="9966960" cy="762000"/>
+            <a:off x="1463040" y="3002280"/>
+            <a:ext cx="9966960" cy="682752"/>
           </a:xfrm>
           <a:prstGeom prst="rect">
             <a:avLst/>
@@ -7995,12 +7995,12 @@
         </p:nvSpPr>
         <p:spPr>
           <a:xfrm>
-            <a:off x="548640" y="4032504"/>
-            <a:ext cx="11064240" cy="762000"/>
+            <a:off x="548640" y="3794760"/>
+            <a:ext cx="11064240" cy="682752"/>
           </a:xfrm>
           <a:prstGeom prst="roundRect">
             <a:avLst>
-              <a:gd name="adj" fmla="val 14400"/>
+              <a:gd name="adj" fmla="val 16071"/>
             </a:avLst>
           </a:prstGeom>
           <a:solidFill>
@@ -8026,8 +8026,8 @@
         </p:nvSpPr>
         <p:spPr>
           <a:xfrm>
-            <a:off x="731520" y="4032504"/>
-            <a:ext cx="548640" cy="762000"/>
+            <a:off x="731520" y="3794760"/>
+            <a:ext cx="548640" cy="682752"/>
           </a:xfrm>
           <a:prstGeom prst="rect">
             <a:avLst/>
@@ -8062,8 +8062,8 @@
         </p:nvSpPr>
         <p:spPr>
           <a:xfrm>
-            <a:off x="1463040" y="4032504"/>
-            <a:ext cx="9966960" cy="762000"/>
+            <a:off x="1463040" y="3794760"/>
+            <a:ext cx="9966960" cy="682752"/>
           </a:xfrm>
           <a:prstGeom prst="rect">
             <a:avLst/>
@@ -8098,12 +8098,12 @@
         </p:nvSpPr>
         <p:spPr>
           <a:xfrm>
-            <a:off x="548640" y="4904232"/>
-            <a:ext cx="11064240" cy="762000"/>
+            <a:off x="548640" y="4587240"/>
+            <a:ext cx="11064240" cy="682752"/>
           </a:xfrm>
           <a:prstGeom prst="roundRect">
             <a:avLst>
-              <a:gd name="adj" fmla="val 14400"/>
+              <a:gd name="adj" fmla="val 16071"/>
             </a:avLst>
           </a:prstGeom>
           <a:solidFill>
@@ -8129,8 +8129,8 @@
         </p:nvSpPr>
         <p:spPr>
           <a:xfrm>
-            <a:off x="731520" y="4904232"/>
-            <a:ext cx="548640" cy="762000"/>
+            <a:off x="731520" y="4587240"/>
+            <a:ext cx="548640" cy="682752"/>
           </a:xfrm>
           <a:prstGeom prst="rect">
             <a:avLst/>
@@ -8165,8 +8165,8 @@
         </p:nvSpPr>
         <p:spPr>
           <a:xfrm>
-            <a:off x="1463040" y="4904232"/>
-            <a:ext cx="9966960" cy="762000"/>
+            <a:off x="1463040" y="4587240"/>
+            <a:ext cx="9966960" cy="682752"/>
           </a:xfrm>
           <a:prstGeom prst="rect">
             <a:avLst/>
@@ -8201,12 +8201,12 @@
         </p:nvSpPr>
         <p:spPr>
           <a:xfrm>
-            <a:off x="548640" y="5775960"/>
-            <a:ext cx="11064240" cy="762000"/>
+            <a:off x="548640" y="5379720"/>
+            <a:ext cx="11064240" cy="682752"/>
           </a:xfrm>
           <a:prstGeom prst="roundRect">
             <a:avLst>
-              <a:gd name="adj" fmla="val 14400"/>
+              <a:gd name="adj" fmla="val 16071"/>
             </a:avLst>
           </a:prstGeom>
           <a:solidFill>
@@ -8232,8 +8232,8 @@
         </p:nvSpPr>
         <p:spPr>
           <a:xfrm>
-            <a:off x="731520" y="5775960"/>
-            <a:ext cx="548640" cy="762000"/>
+            <a:off x="731520" y="5379720"/>
+            <a:ext cx="548640" cy="682752"/>
           </a:xfrm>
           <a:prstGeom prst="rect">
             <a:avLst/>
@@ -8268,8 +8268,8 @@
         </p:nvSpPr>
         <p:spPr>
           <a:xfrm>
-            <a:off x="1463040" y="5775960"/>
-            <a:ext cx="9966960" cy="762000"/>
+            <a:off x="1463040" y="5379720"/>
+            <a:ext cx="9966960" cy="682752"/>
           </a:xfrm>
           <a:prstGeom prst="rect">
             <a:avLst/>
